--- a/docs/ppt-book/projets/Exercices-CORRIGE.pptx
+++ b/docs/ppt-book/projets/Exercices-CORRIGE.pptx
@@ -11,9 +11,10 @@
     <p:sldId id="259" r:id="rId5"/>
     <p:sldId id="260" r:id="rId6"/>
     <p:sldId id="261" r:id="rId7"/>
+    <p:sldId id="262" r:id="rId8"/>
   </p:sldIdLst>
   <p:notesMasterIdLst>
-    <p:notesMasterId r:id="rId8"/>
+    <p:notesMasterId r:id="rId9"/>
   </p:notesMasterIdLst>
   <p:sldSz cx="9144000" cy="5143500"/>
   <p:notesSz cx="5143500" cy="9144000"/>
@@ -112,7 +113,7 @@
   <p:extLst>
     <p:ext uri="{521415D9-36F7-43E2-AB2F-B90AF26B5E84}">
       <p14:sectionLst xmlns:p14="http://schemas.microsoft.com/office/powerpoint/2010/main">
-        <p14:section name="التمارين" id="{2e61def8-f542-8690-5a83-190a0316e36b}">
+        <p14:section name="التمارين" id="{682c5f51-1fb4-d795-5e25-eff61104c3a3}">
           <p14:sldIdLst>
             <p14:sldId id="256"/>
             <p14:sldId id="257"/>
@@ -120,6 +121,7 @@
             <p14:sldId id="259"/>
             <p14:sldId id="260"/>
             <p14:sldId id="261"/>
+            <p14:sldId id="262"/>
           </p14:sldIdLst>
         </p14:section>
       </p14:sectionLst>
@@ -1212,7 +1214,7 @@
           <a:p>
             <a:r>
               <a:rPr lang="en-US" dirty="0"/>
-              <a:t>البطاقة 1: Apparaître، Démarrer: Au clic. البطاقة 2 و3: Apparaître، Démarrer: Après la précédente، Délai: 00,50. الانتقال: Fondu، Durée: 00,70.</a:t>
+              <a:t/>
             </a:r>
             <a:endParaRPr lang="en-US" dirty="0"/>
           </a:p>
@@ -1236,6 +1238,94 @@
             <a:fld id="{F7021451-1387-4CA6-816F-3879F97B5CBC}" type="slidenum">
               <a:rPr lang="en-US"/>
               <a:t>6</a:t>
+            </a:fld>
+            <a:endParaRPr lang="en-US"/>
+          </a:p>
+        </p:txBody>
+      </p:sp>
+    </p:spTree>
+    <p:extLst>
+      <p:ext uri="{BB962C8B-B14F-4D97-AF65-F5344CB8AC3E}">
+        <p14:creationId xmlns:p14="http://schemas.microsoft.com/office/powerpoint/2010/main" val="1024086991"/>
+      </p:ext>
+    </p:extLst>
+  </p:cSld>
+  <p:clrMapOvr>
+    <a:masterClrMapping/>
+  </p:clrMapOvr>
+</p:notes>
+</file>
+
+<file path=ppt/notesSlides/notesSlide7.xml><?xml version="1.0" encoding="utf-8"?>
+<p:notes xmlns:a="http://schemas.openxmlformats.org/drawingml/2006/main" xmlns:r="http://schemas.openxmlformats.org/officeDocument/2006/relationships" xmlns:p="http://schemas.openxmlformats.org/presentationml/2006/main">
+  <p:cSld>
+    <p:spTree>
+      <p:nvGrpSpPr>
+        <p:cNvPr id="1" name=""/>
+        <p:cNvGrpSpPr/>
+        <p:nvPr/>
+      </p:nvGrpSpPr>
+      <p:grpSpPr>
+        <a:xfrm>
+          <a:off x="0" y="0"/>
+          <a:ext cx="0" cy="0"/>
+          <a:chOff x="0" y="0"/>
+          <a:chExt cx="0" cy="0"/>
+        </a:xfrm>
+      </p:grpSpPr>
+      <p:sp>
+        <p:nvSpPr>
+          <p:cNvPr id="2" name="Slide Image Placeholder 1"/>
+          <p:cNvSpPr>
+            <a:spLocks noGrp="1" noRot="1" noChangeAspect="1"/>
+          </p:cNvSpPr>
+          <p:nvPr>
+            <p:ph type="sldImg"/>
+          </p:nvPr>
+        </p:nvSpPr>
+        <p:spPr/>
+      </p:sp>
+      <p:sp>
+        <p:nvSpPr>
+          <p:cNvPr id="3" name="Notes Placeholder 2"/>
+          <p:cNvSpPr>
+            <a:spLocks noGrp="1"/>
+          </p:cNvSpPr>
+          <p:nvPr>
+            <p:ph type="body" idx="1"/>
+          </p:nvPr>
+        </p:nvSpPr>
+        <p:spPr/>
+        <p:txBody>
+          <a:bodyPr/>
+          <a:lstStyle/>
+          <a:p>
+            <a:r>
+              <a:rPr lang="en-US" dirty="0"/>
+              <a:t>البطاقة 1: Apparaître، Démarrer: Au clic. البطاقة 2 و3: Apparaître، Démarrer: Après la précédente، Délai: 00,50. الانتقال: Fondu، Durée: 00,70.</a:t>
+            </a:r>
+            <a:endParaRPr lang="en-US" dirty="0"/>
+          </a:p>
+        </p:txBody>
+      </p:sp>
+      <p:sp>
+        <p:nvSpPr>
+          <p:cNvPr id="4" name="Slide Number Placeholder 3"/>
+          <p:cNvSpPr>
+            <a:spLocks noGrp="1"/>
+          </p:cNvSpPr>
+          <p:nvPr>
+            <p:ph type="sldNum" sz="quarter" idx="10"/>
+          </p:nvPr>
+        </p:nvSpPr>
+        <p:spPr/>
+        <p:txBody>
+          <a:bodyPr/>
+          <a:lstStyle/>
+          <a:p>
+            <a:fld id="{F7021451-1387-4CA6-816F-3879F97B5CBC}" type="slidenum">
+              <a:rPr lang="en-US"/>
+              <a:t>7</a:t>
             </a:fld>
             <a:endParaRPr lang="en-US"/>
           </a:p>
@@ -2136,7 +2226,7 @@
                   <a:schemeClr val="accent2"/>
                 </a:solidFill>
               </a:rPr>
-              <a:t>تمرين لكل فصل من الفصول 3 إلى 10</a:t>
+              <a:t>تمرين لكل فصل تطبيقي من الفصول 3 إلى 11</a:t>
             </a:r>
             <a:endParaRPr lang="en-US" sz="2000" dirty="0"/>
           </a:p>
@@ -3197,7 +3287,7 @@
                   <a:schemeClr val="tx2"/>
                 </a:solidFill>
               </a:rPr>
-              <a:t>تمرين الفصلين 9 و10: الانتقال والحركة</a:t>
+              <a:t>المبيعات ارتفعت 25 % هذا العام</a:t>
             </a:r>
             <a:endParaRPr lang="en-US" sz="3000" dirty="0"/>
           </a:p>
@@ -3205,18 +3295,90 @@
       </p:sp>
       <p:sp>
         <p:nvSpPr>
-          <p:cNvPr id="3" name="carte"/>
+          <p:cNvPr id="3" name="Text 1"/>
+          <p:cNvSpPr txBox="1"/>
+          <p:nvPr/>
+        </p:nvSpPr>
+        <p:spPr>
+          <a:xfrm>
+            <a:off x="4572000" y="1051560"/>
+            <a:ext cx="4114800" cy="914400"/>
+          </a:xfrm>
+          <a:prstGeom prst="rect">
+            <a:avLst/>
+          </a:prstGeom>
+          <a:noFill/>
+          <a:ln/>
+        </p:spPr>
+        <p:txBody>
+          <a:bodyPr wrap="square" rtlCol="0" anchor="ctr"/>
+          <a:lstStyle/>
+          <a:p>
+            <a:pPr algn="r" indent="0" marL="0">
+              <a:buNone/>
+            </a:pPr>
+            <a:r>
+              <a:rPr lang="en-US" sz="5400" b="1" dirty="0">
+                <a:solidFill>
+                  <a:schemeClr val="accent1"/>
+                </a:solidFill>
+              </a:rPr>
+              <a:t>+25 %</a:t>
+            </a:r>
+            <a:endParaRPr lang="en-US" sz="5400" dirty="0"/>
+          </a:p>
+        </p:txBody>
+      </p:sp>
+      <p:sp>
+        <p:nvSpPr>
+          <p:cNvPr id="4" name="Text 2"/>
+          <p:cNvSpPr txBox="1"/>
+          <p:nvPr/>
+        </p:nvSpPr>
+        <p:spPr>
+          <a:xfrm>
+            <a:off x="457200" y="1280160"/>
+            <a:ext cx="4023360" cy="548640"/>
+          </a:xfrm>
+          <a:prstGeom prst="rect">
+            <a:avLst/>
+          </a:prstGeom>
+          <a:noFill/>
+          <a:ln/>
+        </p:spPr>
+        <p:txBody>
+          <a:bodyPr wrap="square" rtlCol="0" anchor="ctr"/>
+          <a:lstStyle/>
+          <a:p>
+            <a:pPr rtl="1" algn="r" indent="0" marL="0">
+              <a:buNone/>
+            </a:pPr>
+            <a:r>
+              <a:rPr lang="en-US" sz="2000" dirty="0">
+                <a:solidFill>
+                  <a:schemeClr val="tx1"/>
+                </a:solidFill>
+              </a:rPr>
+              <a:t>نمو المبيعات مقارنة بالسنة الماضية</a:t>
+            </a:r>
+            <a:endParaRPr lang="en-US" sz="2000" dirty="0"/>
+          </a:p>
+        </p:txBody>
+      </p:sp>
+      <p:sp>
+        <p:nvSpPr>
+          <p:cNvPr id="5" name="Shape 3"/>
           <p:cNvSpPr/>
           <p:nvPr/>
         </p:nvSpPr>
         <p:spPr>
           <a:xfrm>
-            <a:off x="6035040" y="1188720"/>
-            <a:ext cx="2651760" cy="2377440"/>
+            <a:off x="6035040" y="2240280"/>
+            <a:ext cx="2651760" cy="1600200"/>
           </a:xfrm>
           <a:prstGeom prst="roundRect">
             <a:avLst>
-              <a:gd name="adj" fmla="val 4615"/>
+              <a:gd name="adj" fmla="val 6857"/>
             </a:avLst>
           </a:prstGeom>
           <a:solidFill>
@@ -3232,14 +3394,14 @@
       </p:sp>
       <p:sp>
         <p:nvSpPr>
-          <p:cNvPr id="4" name="Text 2"/>
+          <p:cNvPr id="6" name="Text 4"/>
           <p:cNvSpPr txBox="1"/>
           <p:nvPr/>
         </p:nvSpPr>
         <p:spPr>
           <a:xfrm>
-            <a:off x="8001000" y="1371600"/>
-            <a:ext cx="502920" cy="502920"/>
+            <a:off x="8092440" y="2377440"/>
+            <a:ext cx="457200" cy="457200"/>
           </a:xfrm>
           <a:prstGeom prst="ellipse">
             <a:avLst/>
@@ -3257,27 +3419,27 @@
               <a:buNone/>
             </a:pPr>
             <a:r>
-              <a:rPr lang="en-US" sz="1800" b="1" dirty="0">
+              <a:rPr lang="en-US" sz="1600" b="1" dirty="0">
                 <a:solidFill>
                   <a:schemeClr val="bg1"/>
                 </a:solidFill>
               </a:rPr>
               <a:t>1</a:t>
             </a:r>
-            <a:endParaRPr lang="en-US" sz="1800" dirty="0"/>
-          </a:p>
-        </p:txBody>
-      </p:sp>
-      <p:sp>
-        <p:nvSpPr>
-          <p:cNvPr id="5" name="Text 3"/>
+            <a:endParaRPr lang="en-US" sz="1600" dirty="0"/>
+          </a:p>
+        </p:txBody>
+      </p:sp>
+      <p:sp>
+        <p:nvSpPr>
+          <p:cNvPr id="7" name="Text 5"/>
           <p:cNvSpPr txBox="1"/>
           <p:nvPr/>
         </p:nvSpPr>
         <p:spPr>
           <a:xfrm>
-            <a:off x="6217920" y="1965960"/>
-            <a:ext cx="2286000" cy="411480"/>
+            <a:off x="6172200" y="2834640"/>
+            <a:ext cx="2377440" cy="457200"/>
           </a:xfrm>
           <a:prstGeom prst="rect">
             <a:avLst/>
@@ -3293,27 +3455,27 @@
               <a:buNone/>
             </a:pPr>
             <a:r>
-              <a:rPr lang="en-US" sz="1600" b="1" dirty="0">
+              <a:rPr lang="en-US" sz="2000" b="1" dirty="0">
                 <a:solidFill>
                   <a:schemeClr val="tx2"/>
                 </a:solidFill>
               </a:rPr>
-              <a:t>أولاً</a:t>
-            </a:r>
-            <a:endParaRPr lang="en-US" sz="1600" dirty="0"/>
-          </a:p>
-        </p:txBody>
-      </p:sp>
-      <p:sp>
-        <p:nvSpPr>
-          <p:cNvPr id="6" name="Text 4"/>
+              <a:t>رضا أعلى</a:t>
+            </a:r>
+            <a:endParaRPr lang="en-US" sz="2000" dirty="0"/>
+          </a:p>
+        </p:txBody>
+      </p:sp>
+      <p:sp>
+        <p:nvSpPr>
+          <p:cNvPr id="8" name="Text 6"/>
           <p:cNvSpPr txBox="1"/>
           <p:nvPr/>
         </p:nvSpPr>
         <p:spPr>
           <a:xfrm>
-            <a:off x="6217920" y="2377440"/>
-            <a:ext cx="2286000" cy="1097280"/>
+            <a:off x="6172200" y="3291840"/>
+            <a:ext cx="2377440" cy="411480"/>
           </a:xfrm>
           <a:prstGeom prst="rect">
             <a:avLst/>
@@ -3322,38 +3484,38 @@
           <a:ln/>
         </p:spPr>
         <p:txBody>
-          <a:bodyPr wrap="square" rtlCol="0" anchor="t"/>
+          <a:bodyPr wrap="square" rtlCol="0" anchor="ctr"/>
           <a:lstStyle/>
           <a:p>
             <a:pPr rtl="1" algn="r" indent="0" marL="0">
               <a:buNone/>
             </a:pPr>
             <a:r>
-              <a:rPr lang="en-US" sz="1400" dirty="0">
+              <a:rPr lang="en-US" sz="1800" dirty="0">
                 <a:solidFill>
                   <a:schemeClr val="tx1"/>
                 </a:solidFill>
               </a:rPr>
-              <a:t>Apparaître · Au clic</a:t>
-            </a:r>
-            <a:endParaRPr lang="en-US" sz="1400" dirty="0"/>
-          </a:p>
-        </p:txBody>
-      </p:sp>
-      <p:sp>
-        <p:nvSpPr>
-          <p:cNvPr id="7" name="carte"/>
+              <a:t>لدى الزبائن</a:t>
+            </a:r>
+            <a:endParaRPr lang="en-US" sz="1800" dirty="0"/>
+          </a:p>
+        </p:txBody>
+      </p:sp>
+      <p:sp>
+        <p:nvSpPr>
+          <p:cNvPr id="9" name="Shape 7"/>
           <p:cNvSpPr/>
           <p:nvPr/>
         </p:nvSpPr>
         <p:spPr>
           <a:xfrm>
-            <a:off x="3246120" y="1188720"/>
-            <a:ext cx="2651760" cy="2377440"/>
+            <a:off x="3246120" y="2240280"/>
+            <a:ext cx="2651760" cy="1600200"/>
           </a:xfrm>
           <a:prstGeom prst="roundRect">
             <a:avLst>
-              <a:gd name="adj" fmla="val 4615"/>
+              <a:gd name="adj" fmla="val 6857"/>
             </a:avLst>
           </a:prstGeom>
           <a:solidFill>
@@ -3369,14 +3531,14 @@
       </p:sp>
       <p:sp>
         <p:nvSpPr>
-          <p:cNvPr id="8" name="Text 6"/>
+          <p:cNvPr id="10" name="Text 8"/>
           <p:cNvSpPr txBox="1"/>
           <p:nvPr/>
         </p:nvSpPr>
         <p:spPr>
           <a:xfrm>
-            <a:off x="5212080" y="1371600"/>
-            <a:ext cx="502920" cy="502920"/>
+            <a:off x="5303520" y="2377440"/>
+            <a:ext cx="457200" cy="457200"/>
           </a:xfrm>
           <a:prstGeom prst="ellipse">
             <a:avLst/>
@@ -3394,27 +3556,27 @@
               <a:buNone/>
             </a:pPr>
             <a:r>
-              <a:rPr lang="en-US" sz="1800" b="1" dirty="0">
+              <a:rPr lang="en-US" sz="1600" b="1" dirty="0">
                 <a:solidFill>
                   <a:schemeClr val="bg1"/>
                 </a:solidFill>
               </a:rPr>
               <a:t>2</a:t>
             </a:r>
-            <a:endParaRPr lang="en-US" sz="1800" dirty="0"/>
-          </a:p>
-        </p:txBody>
-      </p:sp>
-      <p:sp>
-        <p:nvSpPr>
-          <p:cNvPr id="9" name="Text 7"/>
+            <a:endParaRPr lang="en-US" sz="1600" dirty="0"/>
+          </a:p>
+        </p:txBody>
+      </p:sp>
+      <p:sp>
+        <p:nvSpPr>
+          <p:cNvPr id="11" name="Text 9"/>
           <p:cNvSpPr txBox="1"/>
           <p:nvPr/>
         </p:nvSpPr>
         <p:spPr>
           <a:xfrm>
-            <a:off x="3429000" y="1965960"/>
-            <a:ext cx="2286000" cy="411480"/>
+            <a:off x="3383280" y="2834640"/>
+            <a:ext cx="2377440" cy="457200"/>
           </a:xfrm>
           <a:prstGeom prst="rect">
             <a:avLst/>
@@ -3430,27 +3592,27 @@
               <a:buNone/>
             </a:pPr>
             <a:r>
-              <a:rPr lang="en-US" sz="1600" b="1" dirty="0">
+              <a:rPr lang="en-US" sz="2000" b="1" dirty="0">
                 <a:solidFill>
                   <a:schemeClr val="tx2"/>
                 </a:solidFill>
               </a:rPr>
-              <a:t>ثانياً</a:t>
-            </a:r>
-            <a:endParaRPr lang="en-US" sz="1600" dirty="0"/>
-          </a:p>
-        </p:txBody>
-      </p:sp>
-      <p:sp>
-        <p:nvSpPr>
-          <p:cNvPr id="10" name="Text 8"/>
+              <a:t>فرعان جديدان</a:t>
+            </a:r>
+            <a:endParaRPr lang="en-US" sz="2000" dirty="0"/>
+          </a:p>
+        </p:txBody>
+      </p:sp>
+      <p:sp>
+        <p:nvSpPr>
+          <p:cNvPr id="12" name="Text 10"/>
           <p:cNvSpPr txBox="1"/>
           <p:nvPr/>
         </p:nvSpPr>
         <p:spPr>
           <a:xfrm>
-            <a:off x="3429000" y="2377440"/>
-            <a:ext cx="2286000" cy="1097280"/>
+            <a:off x="3383280" y="3291840"/>
+            <a:ext cx="2377440" cy="411480"/>
           </a:xfrm>
           <a:prstGeom prst="rect">
             <a:avLst/>
@@ -3459,38 +3621,38 @@
           <a:ln/>
         </p:spPr>
         <p:txBody>
-          <a:bodyPr wrap="square" rtlCol="0" anchor="t"/>
+          <a:bodyPr wrap="square" rtlCol="0" anchor="ctr"/>
           <a:lstStyle/>
           <a:p>
             <a:pPr rtl="1" algn="r" indent="0" marL="0">
               <a:buNone/>
             </a:pPr>
             <a:r>
-              <a:rPr lang="en-US" sz="1400" dirty="0">
+              <a:rPr lang="en-US" sz="1800" dirty="0">
                 <a:solidFill>
                   <a:schemeClr val="tx1"/>
                 </a:solidFill>
               </a:rPr>
-              <a:t>Apparaître · Après la précédente · 0,5 s</a:t>
-            </a:r>
-            <a:endParaRPr lang="en-US" sz="1400" dirty="0"/>
-          </a:p>
-        </p:txBody>
-      </p:sp>
-      <p:sp>
-        <p:nvSpPr>
-          <p:cNvPr id="11" name="carte"/>
+              <a:t>في مدينتين</a:t>
+            </a:r>
+            <a:endParaRPr lang="en-US" sz="1800" dirty="0"/>
+          </a:p>
+        </p:txBody>
+      </p:sp>
+      <p:sp>
+        <p:nvSpPr>
+          <p:cNvPr id="13" name="Shape 11"/>
           <p:cNvSpPr/>
           <p:nvPr/>
         </p:nvSpPr>
         <p:spPr>
           <a:xfrm>
-            <a:off x="457200" y="1188720"/>
-            <a:ext cx="2651760" cy="2377440"/>
+            <a:off x="457200" y="2240280"/>
+            <a:ext cx="2651760" cy="1600200"/>
           </a:xfrm>
           <a:prstGeom prst="roundRect">
             <a:avLst>
-              <a:gd name="adj" fmla="val 4615"/>
+              <a:gd name="adj" fmla="val 6857"/>
             </a:avLst>
           </a:prstGeom>
           <a:solidFill>
@@ -3506,14 +3668,14 @@
       </p:sp>
       <p:sp>
         <p:nvSpPr>
-          <p:cNvPr id="12" name="Text 10"/>
+          <p:cNvPr id="14" name="Text 12"/>
           <p:cNvSpPr txBox="1"/>
           <p:nvPr/>
         </p:nvSpPr>
         <p:spPr>
           <a:xfrm>
-            <a:off x="2423160" y="1371600"/>
-            <a:ext cx="502920" cy="502920"/>
+            <a:off x="2514600" y="2377440"/>
+            <a:ext cx="457200" cy="457200"/>
           </a:xfrm>
           <a:prstGeom prst="ellipse">
             <a:avLst/>
@@ -3531,86 +3693,14 @@
               <a:buNone/>
             </a:pPr>
             <a:r>
-              <a:rPr lang="en-US" sz="1800" b="1" dirty="0">
+              <a:rPr lang="en-US" sz="1600" b="1" dirty="0">
                 <a:solidFill>
                   <a:schemeClr val="bg1"/>
                 </a:solidFill>
               </a:rPr>
               <a:t>3</a:t>
             </a:r>
-            <a:endParaRPr lang="en-US" sz="1800" dirty="0"/>
-          </a:p>
-        </p:txBody>
-      </p:sp>
-      <p:sp>
-        <p:nvSpPr>
-          <p:cNvPr id="13" name="Text 11"/>
-          <p:cNvSpPr txBox="1"/>
-          <p:nvPr/>
-        </p:nvSpPr>
-        <p:spPr>
-          <a:xfrm>
-            <a:off x="640080" y="1965960"/>
-            <a:ext cx="2286000" cy="411480"/>
-          </a:xfrm>
-          <a:prstGeom prst="rect">
-            <a:avLst/>
-          </a:prstGeom>
-          <a:noFill/>
-          <a:ln/>
-        </p:spPr>
-        <p:txBody>
-          <a:bodyPr wrap="square" rtlCol="0" anchor="ctr"/>
-          <a:lstStyle/>
-          <a:p>
-            <a:pPr rtl="1" algn="r" indent="0" marL="0">
-              <a:buNone/>
-            </a:pPr>
-            <a:r>
-              <a:rPr lang="en-US" sz="1600" b="1" dirty="0">
-                <a:solidFill>
-                  <a:schemeClr val="tx2"/>
-                </a:solidFill>
-              </a:rPr>
-              <a:t>ثالثاً</a:t>
-            </a:r>
             <a:endParaRPr lang="en-US" sz="1600" dirty="0"/>
-          </a:p>
-        </p:txBody>
-      </p:sp>
-      <p:sp>
-        <p:nvSpPr>
-          <p:cNvPr id="14" name="Text 12"/>
-          <p:cNvSpPr txBox="1"/>
-          <p:nvPr/>
-        </p:nvSpPr>
-        <p:spPr>
-          <a:xfrm>
-            <a:off x="640080" y="2377440"/>
-            <a:ext cx="2286000" cy="1097280"/>
-          </a:xfrm>
-          <a:prstGeom prst="rect">
-            <a:avLst/>
-          </a:prstGeom>
-          <a:noFill/>
-          <a:ln/>
-        </p:spPr>
-        <p:txBody>
-          <a:bodyPr wrap="square" rtlCol="0" anchor="t"/>
-          <a:lstStyle/>
-          <a:p>
-            <a:pPr rtl="1" algn="r" indent="0" marL="0">
-              <a:buNone/>
-            </a:pPr>
-            <a:r>
-              <a:rPr lang="en-US" sz="1400" dirty="0">
-                <a:solidFill>
-                  <a:schemeClr val="tx1"/>
-                </a:solidFill>
-              </a:rPr>
-              <a:t>Apparaître · Après la précédente · 0,5 s</a:t>
-            </a:r>
-            <a:endParaRPr lang="en-US" sz="1400" dirty="0"/>
           </a:p>
         </p:txBody>
       </p:sp>
@@ -3622,6 +3712,78 @@
         </p:nvSpPr>
         <p:spPr>
           <a:xfrm>
+            <a:off x="594360" y="2834640"/>
+            <a:ext cx="2377440" cy="457200"/>
+          </a:xfrm>
+          <a:prstGeom prst="rect">
+            <a:avLst/>
+          </a:prstGeom>
+          <a:noFill/>
+          <a:ln/>
+        </p:spPr>
+        <p:txBody>
+          <a:bodyPr wrap="square" rtlCol="0" anchor="ctr"/>
+          <a:lstStyle/>
+          <a:p>
+            <a:pPr rtl="1" algn="r" indent="0" marL="0">
+              <a:buNone/>
+            </a:pPr>
+            <a:r>
+              <a:rPr lang="en-US" sz="2000" b="1" dirty="0">
+                <a:solidFill>
+                  <a:schemeClr val="tx2"/>
+                </a:solidFill>
+              </a:rPr>
+              <a:t>فريق أكبر</a:t>
+            </a:r>
+            <a:endParaRPr lang="en-US" sz="2000" dirty="0"/>
+          </a:p>
+        </p:txBody>
+      </p:sp>
+      <p:sp>
+        <p:nvSpPr>
+          <p:cNvPr id="16" name="Text 14"/>
+          <p:cNvSpPr txBox="1"/>
+          <p:nvPr/>
+        </p:nvSpPr>
+        <p:spPr>
+          <a:xfrm>
+            <a:off x="594360" y="3291840"/>
+            <a:ext cx="2377440" cy="411480"/>
+          </a:xfrm>
+          <a:prstGeom prst="rect">
+            <a:avLst/>
+          </a:prstGeom>
+          <a:noFill/>
+          <a:ln/>
+        </p:spPr>
+        <p:txBody>
+          <a:bodyPr wrap="square" rtlCol="0" anchor="ctr"/>
+          <a:lstStyle/>
+          <a:p>
+            <a:pPr rtl="1" algn="r" indent="0" marL="0">
+              <a:buNone/>
+            </a:pPr>
+            <a:r>
+              <a:rPr lang="en-US" sz="1800" dirty="0">
+                <a:solidFill>
+                  <a:schemeClr val="tx1"/>
+                </a:solidFill>
+              </a:rPr>
+              <a:t>في المبيعات</a:t>
+            </a:r>
+            <a:endParaRPr lang="en-US" sz="1800" dirty="0"/>
+          </a:p>
+        </p:txBody>
+      </p:sp>
+      <p:sp>
+        <p:nvSpPr>
+          <p:cNvPr id="17" name="Text 15"/>
+          <p:cNvSpPr txBox="1"/>
+          <p:nvPr/>
+        </p:nvSpPr>
+        <p:spPr>
+          <a:xfrm>
             <a:off x="457200" y="4069080"/>
             <a:ext cx="8229600" cy="594360"/>
           </a:xfrm>
@@ -3644,7 +3806,7 @@
                   <a:srgbClr val="595959"/>
                 </a:solidFill>
               </a:rPr>
-              <a:t>الحل: انتقال Fondu للشريحة، ثم Apparaître لكل بطاقة: الأولى Au clic، والباقي Après la précédente بتأخير 0,5 ثانية (التفاصيل في الملاحظات).</a:t>
+              <a:t>الحل: عنوان يقول الرسالة، ورقم كبير، وثلاث بطاقات محاذية بلونين من السمة، ولا نص أصغر من 18.</a:t>
             </a:r>
             <a:endParaRPr lang="en-US" sz="1200" dirty="0"/>
           </a:p>
@@ -3690,6 +3852,561 @@
             <a:fld id="{F7021451-1387-4CA6-816F-3879F97B5CBC}" type="slidenum">
               <a:rPr b="0" lang="en-US"/>
               <a:t>6</a:t>
+            </a:fld>
+            <a:endParaRPr lang="en-US"/>
+          </a:p>
+        </p:txBody>
+      </p:sp>
+    </p:spTree>
+  </p:cSld>
+  <p:clrMapOvr>
+    <a:masterClrMapping/>
+  </p:clrMapOvr>
+</p:sld>
+</file>
+
+<file path=ppt/slides/slide7.xml><?xml version="1.0" encoding="utf-8"?>
+<p:sld xmlns:a="http://schemas.openxmlformats.org/drawingml/2006/main" xmlns:r="http://schemas.openxmlformats.org/officeDocument/2006/relationships" xmlns:p="http://schemas.openxmlformats.org/presentationml/2006/main">
+  <p:cSld name="Slide 7">
+    <p:spTree>
+      <p:nvGrpSpPr>
+        <p:cNvPr id="1" name=""/>
+        <p:cNvGrpSpPr/>
+        <p:nvPr/>
+      </p:nvGrpSpPr>
+      <p:grpSpPr>
+        <a:xfrm>
+          <a:off x="0" y="0"/>
+          <a:ext cx="0" cy="0"/>
+          <a:chOff x="0" y="0"/>
+          <a:chExt cx="0" cy="0"/>
+        </a:xfrm>
+      </p:grpSpPr>
+      <p:sp>
+        <p:nvSpPr>
+          <p:cNvPr id="2" name="Text 0"/>
+          <p:cNvSpPr/>
+          <p:nvPr>
+            <p:ph idx="100" type="title" hasCustomPrompt="1"/>
+          </p:nvPr>
+        </p:nvSpPr>
+        <p:spPr>
+          <a:xfrm>
+            <a:off x="457200" y="274320"/>
+            <a:ext cx="8229600" cy="685800"/>
+          </a:xfrm>
+          <a:prstGeom prst="rect">
+            <a:avLst/>
+          </a:prstGeom>
+          <a:noFill/>
+          <a:ln/>
+        </p:spPr>
+        <p:txBody>
+          <a:bodyPr wrap="square" rtlCol="0"/>
+          <a:lstStyle/>
+          <a:p>
+            <a:pPr rtl="1" algn="r" indent="0" marL="0">
+              <a:buNone/>
+            </a:pPr>
+            <a:r>
+              <a:rPr lang="en-US" sz="3000" b="1" dirty="0">
+                <a:solidFill>
+                  <a:schemeClr val="tx2"/>
+                </a:solidFill>
+              </a:rPr>
+              <a:t>تمرين الفصلين 10 و11: الانتقال والحركة</a:t>
+            </a:r>
+            <a:endParaRPr lang="en-US" sz="3000" dirty="0"/>
+          </a:p>
+        </p:txBody>
+      </p:sp>
+      <p:sp>
+        <p:nvSpPr>
+          <p:cNvPr id="3" name="carte"/>
+          <p:cNvSpPr/>
+          <p:nvPr/>
+        </p:nvSpPr>
+        <p:spPr>
+          <a:xfrm>
+            <a:off x="6035040" y="1188720"/>
+            <a:ext cx="2651760" cy="2377440"/>
+          </a:xfrm>
+          <a:prstGeom prst="roundRect">
+            <a:avLst>
+              <a:gd name="adj" fmla="val 4615"/>
+            </a:avLst>
+          </a:prstGeom>
+          <a:solidFill>
+            <a:schemeClr val="bg2"/>
+          </a:solidFill>
+          <a:ln w="12700">
+            <a:solidFill>
+              <a:schemeClr val="bg2"/>
+            </a:solidFill>
+            <a:prstDash val="solid"/>
+          </a:ln>
+        </p:spPr>
+      </p:sp>
+      <p:sp>
+        <p:nvSpPr>
+          <p:cNvPr id="4" name="Text 2"/>
+          <p:cNvSpPr txBox="1"/>
+          <p:nvPr/>
+        </p:nvSpPr>
+        <p:spPr>
+          <a:xfrm>
+            <a:off x="8001000" y="1371600"/>
+            <a:ext cx="502920" cy="502920"/>
+          </a:xfrm>
+          <a:prstGeom prst="ellipse">
+            <a:avLst/>
+          </a:prstGeom>
+          <a:solidFill>
+            <a:schemeClr val="accent1"/>
+          </a:solidFill>
+          <a:ln/>
+        </p:spPr>
+        <p:txBody>
+          <a:bodyPr wrap="square" rtlCol="0" anchor="ctr"/>
+          <a:lstStyle/>
+          <a:p>
+            <a:pPr algn="ctr" indent="0" marL="0">
+              <a:buNone/>
+            </a:pPr>
+            <a:r>
+              <a:rPr lang="en-US" sz="1800" b="1" dirty="0">
+                <a:solidFill>
+                  <a:schemeClr val="bg1"/>
+                </a:solidFill>
+              </a:rPr>
+              <a:t>1</a:t>
+            </a:r>
+            <a:endParaRPr lang="en-US" sz="1800" dirty="0"/>
+          </a:p>
+        </p:txBody>
+      </p:sp>
+      <p:sp>
+        <p:nvSpPr>
+          <p:cNvPr id="5" name="Text 3"/>
+          <p:cNvSpPr txBox="1"/>
+          <p:nvPr/>
+        </p:nvSpPr>
+        <p:spPr>
+          <a:xfrm>
+            <a:off x="6217920" y="1965960"/>
+            <a:ext cx="2286000" cy="411480"/>
+          </a:xfrm>
+          <a:prstGeom prst="rect">
+            <a:avLst/>
+          </a:prstGeom>
+          <a:noFill/>
+          <a:ln/>
+        </p:spPr>
+        <p:txBody>
+          <a:bodyPr wrap="square" rtlCol="0" anchor="ctr"/>
+          <a:lstStyle/>
+          <a:p>
+            <a:pPr rtl="1" algn="r" indent="0" marL="0">
+              <a:buNone/>
+            </a:pPr>
+            <a:r>
+              <a:rPr lang="en-US" sz="1600" b="1" dirty="0">
+                <a:solidFill>
+                  <a:schemeClr val="tx2"/>
+                </a:solidFill>
+              </a:rPr>
+              <a:t>أولاً</a:t>
+            </a:r>
+            <a:endParaRPr lang="en-US" sz="1600" dirty="0"/>
+          </a:p>
+        </p:txBody>
+      </p:sp>
+      <p:sp>
+        <p:nvSpPr>
+          <p:cNvPr id="6" name="Text 4"/>
+          <p:cNvSpPr txBox="1"/>
+          <p:nvPr/>
+        </p:nvSpPr>
+        <p:spPr>
+          <a:xfrm>
+            <a:off x="6217920" y="2377440"/>
+            <a:ext cx="2286000" cy="1097280"/>
+          </a:xfrm>
+          <a:prstGeom prst="rect">
+            <a:avLst/>
+          </a:prstGeom>
+          <a:noFill/>
+          <a:ln/>
+        </p:spPr>
+        <p:txBody>
+          <a:bodyPr wrap="square" rtlCol="0" anchor="t"/>
+          <a:lstStyle/>
+          <a:p>
+            <a:pPr rtl="1" algn="r" indent="0" marL="0">
+              <a:buNone/>
+            </a:pPr>
+            <a:r>
+              <a:rPr lang="en-US" sz="1400" dirty="0">
+                <a:solidFill>
+                  <a:schemeClr val="tx1"/>
+                </a:solidFill>
+              </a:rPr>
+              <a:t>Apparaître · Au clic</a:t>
+            </a:r>
+            <a:endParaRPr lang="en-US" sz="1400" dirty="0"/>
+          </a:p>
+        </p:txBody>
+      </p:sp>
+      <p:sp>
+        <p:nvSpPr>
+          <p:cNvPr id="7" name="carte"/>
+          <p:cNvSpPr/>
+          <p:nvPr/>
+        </p:nvSpPr>
+        <p:spPr>
+          <a:xfrm>
+            <a:off x="3246120" y="1188720"/>
+            <a:ext cx="2651760" cy="2377440"/>
+          </a:xfrm>
+          <a:prstGeom prst="roundRect">
+            <a:avLst>
+              <a:gd name="adj" fmla="val 4615"/>
+            </a:avLst>
+          </a:prstGeom>
+          <a:solidFill>
+            <a:schemeClr val="bg2"/>
+          </a:solidFill>
+          <a:ln w="12700">
+            <a:solidFill>
+              <a:schemeClr val="bg2"/>
+            </a:solidFill>
+            <a:prstDash val="solid"/>
+          </a:ln>
+        </p:spPr>
+      </p:sp>
+      <p:sp>
+        <p:nvSpPr>
+          <p:cNvPr id="8" name="Text 6"/>
+          <p:cNvSpPr txBox="1"/>
+          <p:nvPr/>
+        </p:nvSpPr>
+        <p:spPr>
+          <a:xfrm>
+            <a:off x="5212080" y="1371600"/>
+            <a:ext cx="502920" cy="502920"/>
+          </a:xfrm>
+          <a:prstGeom prst="ellipse">
+            <a:avLst/>
+          </a:prstGeom>
+          <a:solidFill>
+            <a:schemeClr val="accent1"/>
+          </a:solidFill>
+          <a:ln/>
+        </p:spPr>
+        <p:txBody>
+          <a:bodyPr wrap="square" rtlCol="0" anchor="ctr"/>
+          <a:lstStyle/>
+          <a:p>
+            <a:pPr algn="ctr" indent="0" marL="0">
+              <a:buNone/>
+            </a:pPr>
+            <a:r>
+              <a:rPr lang="en-US" sz="1800" b="1" dirty="0">
+                <a:solidFill>
+                  <a:schemeClr val="bg1"/>
+                </a:solidFill>
+              </a:rPr>
+              <a:t>2</a:t>
+            </a:r>
+            <a:endParaRPr lang="en-US" sz="1800" dirty="0"/>
+          </a:p>
+        </p:txBody>
+      </p:sp>
+      <p:sp>
+        <p:nvSpPr>
+          <p:cNvPr id="9" name="Text 7"/>
+          <p:cNvSpPr txBox="1"/>
+          <p:nvPr/>
+        </p:nvSpPr>
+        <p:spPr>
+          <a:xfrm>
+            <a:off x="3429000" y="1965960"/>
+            <a:ext cx="2286000" cy="411480"/>
+          </a:xfrm>
+          <a:prstGeom prst="rect">
+            <a:avLst/>
+          </a:prstGeom>
+          <a:noFill/>
+          <a:ln/>
+        </p:spPr>
+        <p:txBody>
+          <a:bodyPr wrap="square" rtlCol="0" anchor="ctr"/>
+          <a:lstStyle/>
+          <a:p>
+            <a:pPr rtl="1" algn="r" indent="0" marL="0">
+              <a:buNone/>
+            </a:pPr>
+            <a:r>
+              <a:rPr lang="en-US" sz="1600" b="1" dirty="0">
+                <a:solidFill>
+                  <a:schemeClr val="tx2"/>
+                </a:solidFill>
+              </a:rPr>
+              <a:t>ثانياً</a:t>
+            </a:r>
+            <a:endParaRPr lang="en-US" sz="1600" dirty="0"/>
+          </a:p>
+        </p:txBody>
+      </p:sp>
+      <p:sp>
+        <p:nvSpPr>
+          <p:cNvPr id="10" name="Text 8"/>
+          <p:cNvSpPr txBox="1"/>
+          <p:nvPr/>
+        </p:nvSpPr>
+        <p:spPr>
+          <a:xfrm>
+            <a:off x="3429000" y="2377440"/>
+            <a:ext cx="2286000" cy="1097280"/>
+          </a:xfrm>
+          <a:prstGeom prst="rect">
+            <a:avLst/>
+          </a:prstGeom>
+          <a:noFill/>
+          <a:ln/>
+        </p:spPr>
+        <p:txBody>
+          <a:bodyPr wrap="square" rtlCol="0" anchor="t"/>
+          <a:lstStyle/>
+          <a:p>
+            <a:pPr rtl="1" algn="r" indent="0" marL="0">
+              <a:buNone/>
+            </a:pPr>
+            <a:r>
+              <a:rPr lang="en-US" sz="1400" dirty="0">
+                <a:solidFill>
+                  <a:schemeClr val="tx1"/>
+                </a:solidFill>
+              </a:rPr>
+              <a:t>Apparaître · Après la précédente · 0,5 s</a:t>
+            </a:r>
+            <a:endParaRPr lang="en-US" sz="1400" dirty="0"/>
+          </a:p>
+        </p:txBody>
+      </p:sp>
+      <p:sp>
+        <p:nvSpPr>
+          <p:cNvPr id="11" name="carte"/>
+          <p:cNvSpPr/>
+          <p:nvPr/>
+        </p:nvSpPr>
+        <p:spPr>
+          <a:xfrm>
+            <a:off x="457200" y="1188720"/>
+            <a:ext cx="2651760" cy="2377440"/>
+          </a:xfrm>
+          <a:prstGeom prst="roundRect">
+            <a:avLst>
+              <a:gd name="adj" fmla="val 4615"/>
+            </a:avLst>
+          </a:prstGeom>
+          <a:solidFill>
+            <a:schemeClr val="bg2"/>
+          </a:solidFill>
+          <a:ln w="12700">
+            <a:solidFill>
+              <a:schemeClr val="bg2"/>
+            </a:solidFill>
+            <a:prstDash val="solid"/>
+          </a:ln>
+        </p:spPr>
+      </p:sp>
+      <p:sp>
+        <p:nvSpPr>
+          <p:cNvPr id="12" name="Text 10"/>
+          <p:cNvSpPr txBox="1"/>
+          <p:nvPr/>
+        </p:nvSpPr>
+        <p:spPr>
+          <a:xfrm>
+            <a:off x="2423160" y="1371600"/>
+            <a:ext cx="502920" cy="502920"/>
+          </a:xfrm>
+          <a:prstGeom prst="ellipse">
+            <a:avLst/>
+          </a:prstGeom>
+          <a:solidFill>
+            <a:schemeClr val="accent1"/>
+          </a:solidFill>
+          <a:ln/>
+        </p:spPr>
+        <p:txBody>
+          <a:bodyPr wrap="square" rtlCol="0" anchor="ctr"/>
+          <a:lstStyle/>
+          <a:p>
+            <a:pPr algn="ctr" indent="0" marL="0">
+              <a:buNone/>
+            </a:pPr>
+            <a:r>
+              <a:rPr lang="en-US" sz="1800" b="1" dirty="0">
+                <a:solidFill>
+                  <a:schemeClr val="bg1"/>
+                </a:solidFill>
+              </a:rPr>
+              <a:t>3</a:t>
+            </a:r>
+            <a:endParaRPr lang="en-US" sz="1800" dirty="0"/>
+          </a:p>
+        </p:txBody>
+      </p:sp>
+      <p:sp>
+        <p:nvSpPr>
+          <p:cNvPr id="13" name="Text 11"/>
+          <p:cNvSpPr txBox="1"/>
+          <p:nvPr/>
+        </p:nvSpPr>
+        <p:spPr>
+          <a:xfrm>
+            <a:off x="640080" y="1965960"/>
+            <a:ext cx="2286000" cy="411480"/>
+          </a:xfrm>
+          <a:prstGeom prst="rect">
+            <a:avLst/>
+          </a:prstGeom>
+          <a:noFill/>
+          <a:ln/>
+        </p:spPr>
+        <p:txBody>
+          <a:bodyPr wrap="square" rtlCol="0" anchor="ctr"/>
+          <a:lstStyle/>
+          <a:p>
+            <a:pPr rtl="1" algn="r" indent="0" marL="0">
+              <a:buNone/>
+            </a:pPr>
+            <a:r>
+              <a:rPr lang="en-US" sz="1600" b="1" dirty="0">
+                <a:solidFill>
+                  <a:schemeClr val="tx2"/>
+                </a:solidFill>
+              </a:rPr>
+              <a:t>ثالثاً</a:t>
+            </a:r>
+            <a:endParaRPr lang="en-US" sz="1600" dirty="0"/>
+          </a:p>
+        </p:txBody>
+      </p:sp>
+      <p:sp>
+        <p:nvSpPr>
+          <p:cNvPr id="14" name="Text 12"/>
+          <p:cNvSpPr txBox="1"/>
+          <p:nvPr/>
+        </p:nvSpPr>
+        <p:spPr>
+          <a:xfrm>
+            <a:off x="640080" y="2377440"/>
+            <a:ext cx="2286000" cy="1097280"/>
+          </a:xfrm>
+          <a:prstGeom prst="rect">
+            <a:avLst/>
+          </a:prstGeom>
+          <a:noFill/>
+          <a:ln/>
+        </p:spPr>
+        <p:txBody>
+          <a:bodyPr wrap="square" rtlCol="0" anchor="t"/>
+          <a:lstStyle/>
+          <a:p>
+            <a:pPr rtl="1" algn="r" indent="0" marL="0">
+              <a:buNone/>
+            </a:pPr>
+            <a:r>
+              <a:rPr lang="en-US" sz="1400" dirty="0">
+                <a:solidFill>
+                  <a:schemeClr val="tx1"/>
+                </a:solidFill>
+              </a:rPr>
+              <a:t>Apparaître · Après la précédente · 0,5 s</a:t>
+            </a:r>
+            <a:endParaRPr lang="en-US" sz="1400" dirty="0"/>
+          </a:p>
+        </p:txBody>
+      </p:sp>
+      <p:sp>
+        <p:nvSpPr>
+          <p:cNvPr id="15" name="Text 13"/>
+          <p:cNvSpPr txBox="1"/>
+          <p:nvPr/>
+        </p:nvSpPr>
+        <p:spPr>
+          <a:xfrm>
+            <a:off x="457200" y="4069080"/>
+            <a:ext cx="8229600" cy="594360"/>
+          </a:xfrm>
+          <a:prstGeom prst="rect">
+            <a:avLst/>
+          </a:prstGeom>
+          <a:noFill/>
+          <a:ln/>
+        </p:spPr>
+        <p:txBody>
+          <a:bodyPr wrap="square" rtlCol="0" anchor="ctr"/>
+          <a:lstStyle/>
+          <a:p>
+            <a:pPr rtl="1" algn="r" indent="0" marL="0">
+              <a:buNone/>
+            </a:pPr>
+            <a:r>
+              <a:rPr lang="en-US" sz="1200" i="1" dirty="0">
+                <a:solidFill>
+                  <a:srgbClr val="595959"/>
+                </a:solidFill>
+              </a:rPr>
+              <a:t>الحل: انتقال Fondu للشريحة، ثم Apparaître لكل بطاقة: الأولى Au clic، والباقي Après la précédente بتأخير 0,5 ثانية (التفاصيل في الملاحظات).</a:t>
+            </a:r>
+            <a:endParaRPr lang="en-US" sz="1200" dirty="0"/>
+          </a:p>
+        </p:txBody>
+      </p:sp>
+      <p:sp>
+        <p:nvSpPr>
+          <p:cNvPr id="25" name="Slide Number Placeholder 0"/>
+          <p:cNvSpPr>
+            <a:spLocks noGrp="1"/>
+          </p:cNvSpPr>
+          <p:nvPr>
+            <p:ph type="sldNum" sz="quarter" idx="4294967295"/>
+          </p:nvPr>
+        </p:nvSpPr>
+        <p:spPr>
+          <a:xfrm>
+            <a:off x="457200" y="4754880"/>
+            <a:ext cx="548640" cy="274320"/>
+          </a:xfrm>
+          <a:prstGeom prst="rect">
+            <a:avLst/>
+          </a:prstGeom>
+          <a:extLst>
+            <a:ext uri="{C572A759-6A51-4108-AA02-DFA0A04FC94B}">
+              <ma14:wrappingTextBoxFlag xmlns:ma14="http://schemas.microsoft.com/office/mac/drawingml/2011/main" val="0"/>
+            </a:ext>
+          </a:extLst>
+        </p:spPr>
+        <p:txBody>
+          <a:bodyPr/>
+          <a:lstStyle>
+            <a:lvl1pPr>
+              <a:defRPr sz="1000">
+                <a:solidFill>
+                  <a:srgbClr val="7F7F7F"/>
+                </a:solidFill>
+              </a:defRPr>
+            </a:lvl1pPr>
+          </a:lstStyle>
+          <a:p>
+            <a:pPr algn="l"/>
+            <a:fld id="{F7021451-1387-4CA6-816F-3879F97B5CBC}" type="slidenum">
+              <a:rPr b="0" lang="en-US"/>
+              <a:t>7</a:t>
             </a:fld>
             <a:endParaRPr lang="en-US"/>
           </a:p>
